--- a/outils/affiches/ecran-programme-complet.pptx
+++ b/outils/affiches/ecran-programme-complet.pptx
@@ -7175,7 +7175,7 @@
                 </a:solidFill>
                 <a:latin typeface="Barlow Condensed"/>
               </a:rPr>
-              <a:t>Vidéo TESTY — libre service</a:t>
+              <a:t>Mini-Série TESTY</a:t>
             </a:r>
           </a:p>
         </p:txBody>
